--- a/ppt/2. TailWind CSS 설정하기.pptx
+++ b/ppt/2. TailWind CSS 설정하기.pptx
@@ -127,6 +127,9 @@
           </p14:sldIdLst>
         </p14:section>
       </p14:sectionLst>
+    </p:ext>
+    <p:ext uri="{EFAFB233-063F-42B5-8137-9DF3F51BA10A}">
+      <p15:sldGuideLst xmlns:p15="http://schemas.microsoft.com/office/powerpoint/2012/main"/>
     </p:ext>
   </p:extLst>
 </p:presentation>
@@ -5391,7 +5394,7 @@
           <a:p>
             <a:r>
               <a:rPr lang="en-US" altLang="ko-KR" sz="1200"/>
-              <a:t>docker run -d -p3323:3306 --name redis-1-mysqldb  -e MYSQL_ROOT_PASSWORD=password  -e MYSQL_DATABASE=redis-1-db -e MYSQL_USER=redis -e MYSQL_PASSWORD=password mysql:latest</a:t>
+              <a:t>docker run -d -p3323:3306 --name redis-1-mysqldb  -e MYSQL_ROOT_PASSWORD=password  -e MYSQL_DATABASE=malldb -e MYSQL_USER=malluserdb -e MYSQL_PASSWORD=malluserdb mysql:latest</a:t>
             </a:r>
           </a:p>
         </p:txBody>
@@ -5527,6 +5530,41 @@
           <a:prstGeom prst="rect">
             <a:avLst/>
           </a:prstGeom>
+        </p:spPr>
+      </p:pic>
+      <p:pic>
+        <p:nvPicPr>
+          <p:cNvPr id="5" name="그림 4">
+            <a:extLst>
+              <a:ext uri="{FF2B5EF4-FFF2-40B4-BE49-F238E27FC236}">
+                <a16:creationId xmlns:a16="http://schemas.microsoft.com/office/drawing/2014/main" id="{44467F14-44D2-F20E-25FB-560D90BB6467}"/>
+              </a:ext>
+            </a:extLst>
+          </p:cNvPr>
+          <p:cNvPicPr>
+            <a:picLocks noChangeAspect="1"/>
+          </p:cNvPicPr>
+          <p:nvPr/>
+        </p:nvPicPr>
+        <p:blipFill>
+          <a:blip r:embed="rId4"/>
+          <a:stretch>
+            <a:fillRect/>
+          </a:stretch>
+        </p:blipFill>
+        <p:spPr>
+          <a:xfrm>
+            <a:off x="7565163" y="5240987"/>
+            <a:ext cx="1600423" cy="1438476"/>
+          </a:xfrm>
+          <a:prstGeom prst="rect">
+            <a:avLst/>
+          </a:prstGeom>
+          <a:ln>
+            <a:solidFill>
+              <a:schemeClr val="tx1"/>
+            </a:solidFill>
+          </a:ln>
         </p:spPr>
       </p:pic>
     </p:spTree>
